--- a/docs/reports/pllsim-项目总结-v0.9.2.pptx
+++ b/docs/reports/pllsim-项目总结-v0.9.2.pptx
@@ -1708,7 +1708,7 @@
                 <a:ea typeface="Microsoft YaHei" pitchFamily="34" charset="-122"/>
                 <a:cs typeface="Microsoft YaHei" pitchFamily="34" charset="-120"/>
               </a:rPr>
-              <a:t>v0.9.2    ·    6 种架构    ·    452 项自动化测试</a:t>
+              <a:t>v0.9.2    ·    6 种架构    ·    537 项自动化测试</a:t>
             </a:r>
             <a:endParaRPr lang="en-US" sz="1400" dirty="0"/>
           </a:p>
@@ -2737,7 +2737,7 @@
                 <a:ea typeface="Microsoft YaHei" pitchFamily="34" charset="-122"/>
                 <a:cs typeface="Microsoft YaHei" pitchFamily="34" charset="-120"/>
               </a:rPr>
-              <a:t>452</a:t>
+              <a:t>537</a:t>
             </a:r>
             <a:endParaRPr lang="en-US" sz="3400" dirty="0"/>
           </a:p>
@@ -7229,7 +7229,7 @@
                 <a:ea typeface="Microsoft YaHei" pitchFamily="34" charset="-122"/>
                 <a:cs typeface="Microsoft YaHei" pitchFamily="34" charset="-120"/>
               </a:rPr>
-              <a:t>452 项自动化测试，每次代码提交在两个 Python 版本上全量运行</a:t>
+              <a:t>537 项自动化测试，每次代码提交在两个 Python 版本上全量运行</a:t>
             </a:r>
             <a:endParaRPr lang="en-US" sz="1400" dirty="0"/>
           </a:p>
@@ -7932,7 +7932,7 @@
                 <a:ea typeface="Microsoft YaHei" pitchFamily="34" charset="-122"/>
                 <a:cs typeface="Microsoft YaHei" pitchFamily="34" charset="-120"/>
               </a:rPr>
-              <a:t>13 个版本全部带发布说明：每一个变动的数字都写明「哪个数变了、为什么」，不悄悄改基准。</a:t>
+              <a:t>14 个版本全部带发布说明：每一个变动的数字都写明「哪个数变了、为什么」，不悄悄改基准。</a:t>
             </a:r>
             <a:endParaRPr lang="en-US" sz="1450" dirty="0"/>
           </a:p>

--- a/docs/reports/pllsim-项目总结-v0.9.2.pptx
+++ b/docs/reports/pllsim-项目总结-v0.9.2.pptx
@@ -1708,7 +1708,7 @@
                 <a:ea typeface="Microsoft YaHei" pitchFamily="34" charset="-122"/>
                 <a:cs typeface="Microsoft YaHei" pitchFamily="34" charset="-120"/>
               </a:rPr>
-              <a:t>v0.9.2    ·    6 种架构    ·    537 项自动化测试</a:t>
+              <a:t>v0.9.2    ·    6 种架构    ·    653 项自动化测试</a:t>
             </a:r>
             <a:endParaRPr lang="en-US" sz="1400" dirty="0"/>
           </a:p>
@@ -2737,7 +2737,7 @@
                 <a:ea typeface="Microsoft YaHei" pitchFamily="34" charset="-122"/>
                 <a:cs typeface="Microsoft YaHei" pitchFamily="34" charset="-120"/>
               </a:rPr>
-              <a:t>537</a:t>
+              <a:t>653</a:t>
             </a:r>
             <a:endParaRPr lang="en-US" sz="3400" dirty="0"/>
           </a:p>
@@ -7229,7 +7229,7 @@
                 <a:ea typeface="Microsoft YaHei" pitchFamily="34" charset="-122"/>
                 <a:cs typeface="Microsoft YaHei" pitchFamily="34" charset="-120"/>
               </a:rPr>
-              <a:t>537 项自动化测试，每次代码提交在两个 Python 版本上全量运行</a:t>
+              <a:t>653 项自动化测试，每次代码提交在两个 Python 版本上全量运行</a:t>
             </a:r>
             <a:endParaRPr lang="en-US" sz="1400" dirty="0"/>
           </a:p>

--- a/docs/reports/pllsim-项目总结-v0.9.2.pptx
+++ b/docs/reports/pllsim-项目总结-v0.9.2.pptx
@@ -1708,7 +1708,7 @@
                 <a:ea typeface="Microsoft YaHei" pitchFamily="34" charset="-122"/>
                 <a:cs typeface="Microsoft YaHei" pitchFamily="34" charset="-120"/>
               </a:rPr>
-              <a:t>v0.9.2    ·    6 种架构    ·    653 项自动化测试</a:t>
+              <a:t>v0.9.2    ·    6 种架构    ·    770 项自动化测试</a:t>
             </a:r>
             <a:endParaRPr lang="en-US" sz="1400" dirty="0"/>
           </a:p>
@@ -2737,7 +2737,7 @@
                 <a:ea typeface="Microsoft YaHei" pitchFamily="34" charset="-122"/>
                 <a:cs typeface="Microsoft YaHei" pitchFamily="34" charset="-120"/>
               </a:rPr>
-              <a:t>653</a:t>
+              <a:t>770</a:t>
             </a:r>
             <a:endParaRPr lang="en-US" sz="3400" dirty="0"/>
           </a:p>
@@ -7229,7 +7229,7 @@
                 <a:ea typeface="Microsoft YaHei" pitchFamily="34" charset="-122"/>
                 <a:cs typeface="Microsoft YaHei" pitchFamily="34" charset="-120"/>
               </a:rPr>
-              <a:t>653 项自动化测试，每次代码提交在两个 Python 版本上全量运行</a:t>
+              <a:t>770 项自动化测试，每次代码提交在两个 Python 版本上全量运行</a:t>
             </a:r>
             <a:endParaRPr lang="en-US" sz="1400" dirty="0"/>
           </a:p>
